--- a/03-课件PPT/讲次版/第7章-1-讲次 7-1 · DeerFlow 企业级平台架构解析.pptx
+++ b/03-课件PPT/讲次版/第7章-1-讲次 7-1 · DeerFlow 企业级平台架构解析.pptx
@@ -3905,46 +3905,7 @@
       </p:sp>
       <p:sp>
         <p:nvSpPr>
-          <p:cNvPr id="5" name="TextBox 4"/>
-          <p:cNvSpPr txBox="1"/>
-          <p:nvPr/>
-        </p:nvSpPr>
-        <p:spPr>
-          <a:xfrm>
-            <a:off x="9334500" y="0"/>
-            <a:ext cx="2667000" cy="704850"/>
-          </a:xfrm>
-          <a:prstGeom prst="rect">
-            <a:avLst/>
-          </a:prstGeom>
-          <a:noFill/>
-        </p:spPr>
-        <p:txBody>
-          <a:bodyPr wrap="square" anchor="ctr">
-            <a:spAutoFit/>
-          </a:bodyPr>
-          <a:lstStyle/>
-          <a:p>
-            <a:pPr algn="r">
-              <a:lnSpc>
-                <a:spcPct val="100000"/>
-              </a:lnSpc>
-            </a:pPr>
-            <a:r>
-              <a:rPr sz="1100" b="0">
-                <a:solidFill>
-                  <a:srgbClr val="94A3B8"/>
-                </a:solidFill>
-                <a:latin typeface="PingFang SC"/>
-              </a:rPr>
-              <a:t>上下文省 60%</a:t>
-            </a:r>
-          </a:p>
-        </p:txBody>
-      </p:sp>
-      <p:sp>
-        <p:nvSpPr>
-          <p:cNvPr id="6" name="Rounded Rectangle 5"/>
+          <p:cNvPr id="5" name="Rounded Rectangle 4"/>
           <p:cNvSpPr/>
           <p:nvPr/>
         </p:nvSpPr>
@@ -3992,7 +3953,7 @@
       </p:sp>
       <p:sp>
         <p:nvSpPr>
-          <p:cNvPr id="7" name="Rectangle 6"/>
+          <p:cNvPr id="6" name="Rectangle 5"/>
           <p:cNvSpPr/>
           <p:nvPr/>
         </p:nvSpPr>
@@ -4036,7 +3997,7 @@
       </p:sp>
       <p:sp>
         <p:nvSpPr>
-          <p:cNvPr id="8" name="Rounded Rectangle 7"/>
+          <p:cNvPr id="7" name="Rounded Rectangle 6"/>
           <p:cNvSpPr/>
           <p:nvPr/>
         </p:nvSpPr>
@@ -4082,7 +4043,7 @@
       </p:sp>
       <p:sp>
         <p:nvSpPr>
-          <p:cNvPr id="9" name="TextBox 8"/>
+          <p:cNvPr id="8" name="TextBox 7"/>
           <p:cNvSpPr txBox="1"/>
           <p:nvPr/>
         </p:nvSpPr>
@@ -4121,7 +4082,7 @@
       </p:sp>
       <p:sp>
         <p:nvSpPr>
-          <p:cNvPr id="10" name="TextBox 9"/>
+          <p:cNvPr id="9" name="TextBox 8"/>
           <p:cNvSpPr txBox="1"/>
           <p:nvPr/>
         </p:nvSpPr>
@@ -4153,14 +4114,14 @@
                 </a:solidFill>
                 <a:latin typeface="PingFang SC"/>
               </a:rPr>
-              <a:t>note=注册了≠能用:每次装配都是一次决策|上下文省 60%</a:t>
-            </a:r>
-          </a:p>
-        </p:txBody>
-      </p:sp>
-      <p:sp>
-        <p:nvSpPr>
-          <p:cNvPr id="11" name="TextBox 10"/>
+              <a:t>note=注册了≠能用:每次装配都是一次决策</a:t>
+            </a:r>
+          </a:p>
+        </p:txBody>
+      </p:sp>
+      <p:sp>
+        <p:nvSpPr>
+          <p:cNvPr id="10" name="TextBox 9"/>
           <p:cNvSpPr txBox="1"/>
           <p:nvPr/>
         </p:nvSpPr>
@@ -4199,7 +4160,7 @@
       </p:sp>
       <p:sp>
         <p:nvSpPr>
-          <p:cNvPr id="12" name="TextBox 11"/>
+          <p:cNvPr id="11" name="TextBox 10"/>
           <p:cNvSpPr txBox="1"/>
           <p:nvPr/>
         </p:nvSpPr>
@@ -6482,7 +6443,7 @@
                 </a:solidFill>
                 <a:latin typeface="PingFang SC"/>
               </a:rPr>
-              <a:t>5. 响应进管道 II|管道可插拔:顺序可编排</a:t>
+              <a:t>5. 响应进管道 II</a:t>
             </a:r>
           </a:p>
         </p:txBody>
@@ -7707,46 +7668,7 @@
       </p:sp>
       <p:sp>
         <p:nvSpPr>
-          <p:cNvPr id="5" name="TextBox 4"/>
-          <p:cNvSpPr txBox="1"/>
-          <p:nvPr/>
-        </p:nvSpPr>
-        <p:spPr>
-          <a:xfrm>
-            <a:off x="9334500" y="0"/>
-            <a:ext cx="2667000" cy="704850"/>
-          </a:xfrm>
-          <a:prstGeom prst="rect">
-            <a:avLst/>
-          </a:prstGeom>
-          <a:noFill/>
-        </p:spPr>
-        <p:txBody>
-          <a:bodyPr wrap="square" anchor="ctr">
-            <a:spAutoFit/>
-          </a:bodyPr>
-          <a:lstStyle/>
-          <a:p>
-            <a:pPr algn="r">
-              <a:lnSpc>
-                <a:spcPct val="100000"/>
-              </a:lnSpc>
-            </a:pPr>
-            <a:r>
-              <a:rPr sz="1100" b="0">
-                <a:solidFill>
-                  <a:srgbClr val="94A3B8"/>
-                </a:solidFill>
-                <a:latin typeface="PingFang SC"/>
-              </a:rPr>
-              <a:t>最大重试 2 次后降级</a:t>
-            </a:r>
-          </a:p>
-        </p:txBody>
-      </p:sp>
-      <p:sp>
-        <p:nvSpPr>
-          <p:cNvPr id="6" name="Rounded Rectangle 5"/>
+          <p:cNvPr id="5" name="Rounded Rectangle 4"/>
           <p:cNvSpPr/>
           <p:nvPr/>
         </p:nvSpPr>
@@ -7794,7 +7716,7 @@
       </p:sp>
       <p:sp>
         <p:nvSpPr>
-          <p:cNvPr id="7" name="Rectangle 6"/>
+          <p:cNvPr id="6" name="Rectangle 5"/>
           <p:cNvSpPr/>
           <p:nvPr/>
         </p:nvSpPr>
@@ -7838,7 +7760,7 @@
       </p:sp>
       <p:sp>
         <p:nvSpPr>
-          <p:cNvPr id="8" name="Rounded Rectangle 7"/>
+          <p:cNvPr id="7" name="Rounded Rectangle 6"/>
           <p:cNvSpPr/>
           <p:nvPr/>
         </p:nvSpPr>
@@ -7884,7 +7806,7 @@
       </p:sp>
       <p:sp>
         <p:nvSpPr>
-          <p:cNvPr id="9" name="TextBox 8"/>
+          <p:cNvPr id="8" name="TextBox 7"/>
           <p:cNvSpPr txBox="1"/>
           <p:nvPr/>
         </p:nvSpPr>
@@ -7923,7 +7845,7 @@
       </p:sp>
       <p:sp>
         <p:nvSpPr>
-          <p:cNvPr id="10" name="TextBox 9"/>
+          <p:cNvPr id="9" name="TextBox 8"/>
           <p:cNvSpPr txBox="1"/>
           <p:nvPr/>
         </p:nvSpPr>
@@ -7955,14 +7877,14 @@
                 </a:solidFill>
                 <a:latin typeface="PingFang SC"/>
               </a:rPr>
-              <a:t>loop=4|最大重试 2 次后降级</a:t>
-            </a:r>
-          </a:p>
-        </p:txBody>
-      </p:sp>
-      <p:sp>
-        <p:nvSpPr>
-          <p:cNvPr id="11" name="Rounded Rectangle 10"/>
+              <a:t>loop=4</a:t>
+            </a:r>
+          </a:p>
+        </p:txBody>
+      </p:sp>
+      <p:sp>
+        <p:nvSpPr>
+          <p:cNvPr id="10" name="Rounded Rectangle 9"/>
           <p:cNvSpPr/>
           <p:nvPr/>
         </p:nvSpPr>
@@ -8008,7 +7930,7 @@
       </p:sp>
       <p:sp>
         <p:nvSpPr>
-          <p:cNvPr id="12" name="TextBox 11"/>
+          <p:cNvPr id="11" name="TextBox 10"/>
           <p:cNvSpPr txBox="1"/>
           <p:nvPr/>
         </p:nvSpPr>
@@ -8047,7 +7969,7 @@
       </p:sp>
       <p:sp>
         <p:nvSpPr>
-          <p:cNvPr id="13" name="TextBox 12"/>
+          <p:cNvPr id="12" name="TextBox 11"/>
           <p:cNvSpPr txBox="1"/>
           <p:nvPr/>
         </p:nvSpPr>
@@ -8086,7 +8008,7 @@
       </p:sp>
       <p:sp>
         <p:nvSpPr>
-          <p:cNvPr id="14" name="TextBox 13"/>
+          <p:cNvPr id="13" name="TextBox 12"/>
           <p:cNvSpPr txBox="1"/>
           <p:nvPr/>
         </p:nvSpPr>
@@ -10278,7 +10200,7 @@
                 </a:solidFill>
                 <a:latin typeface="PingFang SC"/>
               </a:rPr>
-              <a:t>全操作回放|与平台 LocalSandbox 同构</a:t>
+              <a:t>全操作回放</a:t>
             </a:r>
           </a:p>
         </p:txBody>
@@ -11503,46 +11425,7 @@
       </p:sp>
       <p:sp>
         <p:nvSpPr>
-          <p:cNvPr id="5" name="TextBox 4"/>
-          <p:cNvSpPr txBox="1"/>
-          <p:nvPr/>
-        </p:nvSpPr>
-        <p:spPr>
-          <a:xfrm>
-            <a:off x="9334500" y="0"/>
-            <a:ext cx="2667000" cy="704850"/>
-          </a:xfrm>
-          <a:prstGeom prst="rect">
-            <a:avLst/>
-          </a:prstGeom>
-          <a:noFill/>
-        </p:spPr>
-        <p:txBody>
-          <a:bodyPr wrap="square" anchor="ctr">
-            <a:spAutoFit/>
-          </a:bodyPr>
-          <a:lstStyle/>
-          <a:p>
-            <a:pPr algn="r">
-              <a:lnSpc>
-                <a:spcPct val="100000"/>
-              </a:lnSpc>
-            </a:pPr>
-            <a:r>
-              <a:rPr sz="1100" b="0">
-                <a:solidFill>
-                  <a:srgbClr val="94A3B8"/>
-                </a:solidFill>
-                <a:latin typeface="PingFang SC"/>
-              </a:rPr>
-              <a:t>一个"完整但被关小"的 Agent</a:t>
-            </a:r>
-          </a:p>
-        </p:txBody>
-      </p:sp>
-      <p:sp>
-        <p:nvSpPr>
-          <p:cNvPr id="6" name="Rounded Rectangle 5"/>
+          <p:cNvPr id="5" name="Rounded Rectangle 4"/>
           <p:cNvSpPr/>
           <p:nvPr/>
         </p:nvSpPr>
@@ -11588,6 +11471,45 @@
       </p:sp>
       <p:sp>
         <p:nvSpPr>
+          <p:cNvPr id="6" name="TextBox 5"/>
+          <p:cNvSpPr txBox="1"/>
+          <p:nvPr/>
+        </p:nvSpPr>
+        <p:spPr>
+          <a:xfrm>
+            <a:off x="1962150" y="685800"/>
+            <a:ext cx="1905000" cy="209550"/>
+          </a:xfrm>
+          <a:prstGeom prst="rect">
+            <a:avLst/>
+          </a:prstGeom>
+          <a:noFill/>
+        </p:spPr>
+        <p:txBody>
+          <a:bodyPr wrap="square" anchor="ctr">
+            <a:spAutoFit/>
+          </a:bodyPr>
+          <a:lstStyle/>
+          <a:p>
+            <a:pPr algn="l">
+              <a:lnSpc>
+                <a:spcPct val="100000"/>
+              </a:lnSpc>
+            </a:pPr>
+            <a:r>
+              <a:rPr sz="1100" b="1">
+                <a:solidFill>
+                  <a:srgbClr val="2563EB"/>
+                </a:solidFill>
+                <a:latin typeface="PingFang SC"/>
+              </a:rPr>
+              <a:t>L1</a:t>
+            </a:r>
+          </a:p>
+        </p:txBody>
+      </p:sp>
+      <p:sp>
+        <p:nvSpPr>
           <p:cNvPr id="7" name="Rounded Rectangle 6"/>
           <p:cNvSpPr/>
           <p:nvPr/>
@@ -11686,29 +11608,29 @@
         </p:nvSpPr>
         <p:spPr>
           <a:xfrm>
-            <a:off x="2038350" y="952500"/>
-            <a:ext cx="8534400" cy="1143000"/>
-          </a:xfrm>
-          <a:prstGeom prst="rect">
-            <a:avLst/>
-          </a:prstGeom>
-          <a:noFill/>
-        </p:spPr>
-        <p:txBody>
-          <a:bodyPr wrap="square" anchor="ctr">
+            <a:off x="2057400" y="952500"/>
+            <a:ext cx="8496300" cy="1143000"/>
+          </a:xfrm>
+          <a:prstGeom prst="rect">
+            <a:avLst/>
+          </a:prstGeom>
+          <a:noFill/>
+        </p:spPr>
+        <p:txBody>
+          <a:bodyPr wrap="none" anchor="ctr">
             <a:spAutoFit/>
           </a:bodyPr>
           <a:lstStyle/>
           <a:p>
             <a:pPr algn="l">
               <a:lnSpc>
-                <a:spcPct val="100000"/>
-              </a:lnSpc>
-            </a:pPr>
-            <a:r>
-              <a:rPr sz="1200" b="1">
-                <a:solidFill>
-                  <a:srgbClr val="475569"/>
+                <a:spcPct val="115000"/>
+              </a:lnSpc>
+            </a:pPr>
+            <a:r>
+              <a:rPr sz="1300" b="1">
+                <a:solidFill>
+                  <a:srgbClr val="0B1D3A"/>
                 </a:solidFill>
                 <a:latin typeface="PingFang SC"/>
               </a:rPr>
@@ -11731,9 +11653,9 @@
           <a:prstGeom prst="line">
             <a:avLst/>
           </a:prstGeom>
-          <a:ln w="15240">
+          <a:ln w="17780">
             <a:solidFill>
-              <a:srgbClr val="94A3B8"/>
+              <a:srgbClr val="475569"/>
             </a:solidFill>
           </a:ln>
         </p:spPr>
@@ -11767,7 +11689,7 @@
             <a:avLst/>
           </a:prstGeom>
           <a:solidFill>
-            <a:srgbClr val="94A3B8"/>
+            <a:srgbClr val="475569"/>
           </a:solidFill>
           <a:ln>
             <a:noFill/>
@@ -11798,53 +11720,14 @@
       </p:sp>
       <p:sp>
         <p:nvSpPr>
-          <p:cNvPr id="12" name="TextBox 11"/>
-          <p:cNvSpPr txBox="1"/>
-          <p:nvPr/>
-        </p:nvSpPr>
-        <p:spPr>
-          <a:xfrm>
-            <a:off x="6248400" y="2095500"/>
-            <a:ext cx="2095500" cy="247650"/>
-          </a:xfrm>
-          <a:prstGeom prst="rect">
-            <a:avLst/>
-          </a:prstGeom>
-          <a:noFill/>
-        </p:spPr>
-        <p:txBody>
-          <a:bodyPr wrap="square" anchor="ctr">
-            <a:spAutoFit/>
-          </a:bodyPr>
-          <a:lstStyle/>
-          <a:p>
-            <a:pPr algn="l">
-              <a:lnSpc>
-                <a:spcPct val="100000"/>
-              </a:lnSpc>
-            </a:pPr>
-            <a:r>
-              <a:rPr sz="1000" b="0">
-                <a:solidFill>
-                  <a:srgbClr val="94A3B8"/>
-                </a:solidFill>
-                <a:latin typeface="PingFang SC"/>
-              </a:rPr>
-              <a:t>委托</a:t>
-            </a:r>
-          </a:p>
-        </p:txBody>
-      </p:sp>
-      <p:sp>
-        <p:nvSpPr>
-          <p:cNvPr id="13" name="Rounded Rectangle 12"/>
-          <p:cNvSpPr/>
-          <p:nvPr/>
-        </p:nvSpPr>
-        <p:spPr>
-          <a:xfrm>
-            <a:off x="1847850" y="2305050"/>
-            <a:ext cx="8877300" cy="1219200"/>
+          <p:cNvPr id="12" name="Rounded Rectangle 11"/>
+          <p:cNvSpPr/>
+          <p:nvPr/>
+        </p:nvSpPr>
+        <p:spPr>
+          <a:xfrm>
+            <a:off x="5743575" y="2133600"/>
+            <a:ext cx="704850" cy="171450"/>
           </a:xfrm>
           <a:prstGeom prst="roundRect">
             <a:avLst>
@@ -11852,32 +11735,73 @@
             </a:avLst>
           </a:prstGeom>
           <a:solidFill>
-            <a:srgbClr val="F1F5F9"/>
-          </a:solidFill>
-          <a:ln>
-            <a:noFill/>
-          </a:ln>
-          <a:effectLst/>
-        </p:spPr>
-        <p:style>
-          <a:lnRef idx="1">
-            <a:schemeClr val="accent1"/>
-          </a:lnRef>
-          <a:fillRef idx="3">
-            <a:schemeClr val="accent1"/>
-          </a:fillRef>
-          <a:effectRef idx="2">
-            <a:schemeClr val="accent1"/>
-          </a:effectRef>
-          <a:fontRef idx="minor">
-            <a:schemeClr val="lt1"/>
-          </a:fontRef>
-        </p:style>
-        <p:txBody>
-          <a:bodyPr rtlCol="0" anchor="ctr"/>
-          <a:lstStyle/>
-          <a:p>
-            <a:pPr algn="ctr"/>
+            <a:srgbClr val="FFFFFF"/>
+          </a:solidFill>
+          <a:ln w="12700">
+            <a:solidFill>
+              <a:srgbClr val="DDE5EE"/>
+            </a:solidFill>
+          </a:ln>
+          <a:effectLst/>
+        </p:spPr>
+        <p:style>
+          <a:lnRef idx="1">
+            <a:schemeClr val="accent1"/>
+          </a:lnRef>
+          <a:fillRef idx="3">
+            <a:schemeClr val="accent1"/>
+          </a:fillRef>
+          <a:effectRef idx="2">
+            <a:schemeClr val="accent1"/>
+          </a:effectRef>
+          <a:fontRef idx="minor">
+            <a:schemeClr val="lt1"/>
+          </a:fontRef>
+        </p:style>
+        <p:txBody>
+          <a:bodyPr rtlCol="0" anchor="ctr"/>
+          <a:lstStyle/>
+          <a:p>
+            <a:pPr algn="ctr"/>
+          </a:p>
+        </p:txBody>
+      </p:sp>
+      <p:sp>
+        <p:nvSpPr>
+          <p:cNvPr id="13" name="TextBox 12"/>
+          <p:cNvSpPr txBox="1"/>
+          <p:nvPr/>
+        </p:nvSpPr>
+        <p:spPr>
+          <a:xfrm>
+            <a:off x="5743575" y="2133600"/>
+            <a:ext cx="704850" cy="171450"/>
+          </a:xfrm>
+          <a:prstGeom prst="rect">
+            <a:avLst/>
+          </a:prstGeom>
+          <a:noFill/>
+        </p:spPr>
+        <p:txBody>
+          <a:bodyPr wrap="square" anchor="ctr">
+            <a:spAutoFit/>
+          </a:bodyPr>
+          <a:lstStyle/>
+          <a:p>
+            <a:pPr algn="ctr">
+              <a:lnSpc>
+                <a:spcPct val="100000"/>
+              </a:lnSpc>
+            </a:pPr>
+            <a:r>
+              <a:rPr sz="1100" b="1">
+                <a:solidFill>
+                  <a:srgbClr val="0B1D3A"/>
+                </a:solidFill>
+                <a:latin typeface="PingFang SC"/>
+              </a:rPr>
+              <a:t>委托</a:t>
+            </a:r>
           </a:p>
         </p:txBody>
       </p:sp>
@@ -11889,8 +11813,8 @@
         </p:nvSpPr>
         <p:spPr>
           <a:xfrm>
-            <a:off x="1905000" y="2343150"/>
-            <a:ext cx="2819400" cy="1143000"/>
+            <a:off x="1847850" y="2305050"/>
+            <a:ext cx="8877300" cy="1219200"/>
           </a:xfrm>
           <a:prstGeom prst="roundRect">
             <a:avLst>
@@ -11898,6 +11822,91 @@
             </a:avLst>
           </a:prstGeom>
           <a:solidFill>
+            <a:srgbClr val="F1F5F9"/>
+          </a:solidFill>
+          <a:ln>
+            <a:noFill/>
+          </a:ln>
+          <a:effectLst/>
+        </p:spPr>
+        <p:style>
+          <a:lnRef idx="1">
+            <a:schemeClr val="accent1"/>
+          </a:lnRef>
+          <a:fillRef idx="3">
+            <a:schemeClr val="accent1"/>
+          </a:fillRef>
+          <a:effectRef idx="2">
+            <a:schemeClr val="accent1"/>
+          </a:effectRef>
+          <a:fontRef idx="minor">
+            <a:schemeClr val="lt1"/>
+          </a:fontRef>
+        </p:style>
+        <p:txBody>
+          <a:bodyPr rtlCol="0" anchor="ctr"/>
+          <a:lstStyle/>
+          <a:p>
+            <a:pPr algn="ctr"/>
+          </a:p>
+        </p:txBody>
+      </p:sp>
+      <p:sp>
+        <p:nvSpPr>
+          <p:cNvPr id="15" name="TextBox 14"/>
+          <p:cNvSpPr txBox="1"/>
+          <p:nvPr/>
+        </p:nvSpPr>
+        <p:spPr>
+          <a:xfrm>
+            <a:off x="1962150" y="2076450"/>
+            <a:ext cx="1905000" cy="209550"/>
+          </a:xfrm>
+          <a:prstGeom prst="rect">
+            <a:avLst/>
+          </a:prstGeom>
+          <a:noFill/>
+        </p:spPr>
+        <p:txBody>
+          <a:bodyPr wrap="square" anchor="ctr">
+            <a:spAutoFit/>
+          </a:bodyPr>
+          <a:lstStyle/>
+          <a:p>
+            <a:pPr algn="l">
+              <a:lnSpc>
+                <a:spcPct val="100000"/>
+              </a:lnSpc>
+            </a:pPr>
+            <a:r>
+              <a:rPr sz="1100" b="1">
+                <a:solidFill>
+                  <a:srgbClr val="14B8A6"/>
+                </a:solidFill>
+                <a:latin typeface="PingFang SC"/>
+              </a:rPr>
+              <a:t>L2</a:t>
+            </a:r>
+          </a:p>
+        </p:txBody>
+      </p:sp>
+      <p:sp>
+        <p:nvSpPr>
+          <p:cNvPr id="16" name="Rounded Rectangle 15"/>
+          <p:cNvSpPr/>
+          <p:nvPr/>
+        </p:nvSpPr>
+        <p:spPr>
+          <a:xfrm>
+            <a:off x="1905000" y="2343150"/>
+            <a:ext cx="2819400" cy="1143000"/>
+          </a:xfrm>
+          <a:prstGeom prst="roundRect">
+            <a:avLst>
+              <a:gd name="adj" fmla="val 8000"/>
+            </a:avLst>
+          </a:prstGeom>
+          <a:solidFill>
             <a:srgbClr val="FFFFFF"/>
           </a:solidFill>
           <a:ln w="12700">
@@ -11931,7 +11940,7 @@
       </p:sp>
       <p:sp>
         <p:nvSpPr>
-          <p:cNvPr id="15" name="Rectangle 14"/>
+          <p:cNvPr id="17" name="Rectangle 16"/>
           <p:cNvSpPr/>
           <p:nvPr/>
         </p:nvSpPr>
@@ -11975,35 +11984,35 @@
       </p:sp>
       <p:sp>
         <p:nvSpPr>
-          <p:cNvPr id="16" name="TextBox 15"/>
-          <p:cNvSpPr txBox="1"/>
-          <p:nvPr/>
-        </p:nvSpPr>
-        <p:spPr>
-          <a:xfrm>
-            <a:off x="2038350" y="2343150"/>
-            <a:ext cx="2590800" cy="1143000"/>
-          </a:xfrm>
-          <a:prstGeom prst="rect">
-            <a:avLst/>
-          </a:prstGeom>
-          <a:noFill/>
-        </p:spPr>
-        <p:txBody>
-          <a:bodyPr wrap="square" anchor="ctr">
+          <p:cNvPr id="18" name="TextBox 17"/>
+          <p:cNvSpPr txBox="1"/>
+          <p:nvPr/>
+        </p:nvSpPr>
+        <p:spPr>
+          <a:xfrm>
+            <a:off x="2057400" y="2343150"/>
+            <a:ext cx="2552700" cy="1143000"/>
+          </a:xfrm>
+          <a:prstGeom prst="rect">
+            <a:avLst/>
+          </a:prstGeom>
+          <a:noFill/>
+        </p:spPr>
+        <p:txBody>
+          <a:bodyPr wrap="none" anchor="ctr">
             <a:spAutoFit/>
           </a:bodyPr>
           <a:lstStyle/>
           <a:p>
             <a:pPr algn="l">
               <a:lnSpc>
-                <a:spcPct val="100000"/>
-              </a:lnSpc>
-            </a:pPr>
-            <a:r>
-              <a:rPr sz="1200" b="1">
-                <a:solidFill>
-                  <a:srgbClr val="475569"/>
+                <a:spcPct val="115000"/>
+              </a:lnSpc>
+            </a:pPr>
+            <a:r>
+              <a:rPr sz="1300" b="1">
+                <a:solidFill>
+                  <a:srgbClr val="0B1D3A"/>
                 </a:solidFill>
                 <a:latin typeface="PingFang SC"/>
               </a:rPr>
@@ -12014,7 +12023,7 @@
       </p:sp>
       <p:sp>
         <p:nvSpPr>
-          <p:cNvPr id="17" name="Rounded Rectangle 16"/>
+          <p:cNvPr id="19" name="Rounded Rectangle 18"/>
           <p:cNvSpPr/>
           <p:nvPr/>
         </p:nvSpPr>
@@ -12062,7 +12071,7 @@
       </p:sp>
       <p:sp>
         <p:nvSpPr>
-          <p:cNvPr id="18" name="Rectangle 17"/>
+          <p:cNvPr id="20" name="Rectangle 19"/>
           <p:cNvSpPr/>
           <p:nvPr/>
         </p:nvSpPr>
@@ -12106,35 +12115,35 @@
       </p:sp>
       <p:sp>
         <p:nvSpPr>
-          <p:cNvPr id="19" name="TextBox 18"/>
-          <p:cNvSpPr txBox="1"/>
-          <p:nvPr/>
-        </p:nvSpPr>
-        <p:spPr>
-          <a:xfrm>
-            <a:off x="5010150" y="2343150"/>
-            <a:ext cx="2590800" cy="1143000"/>
-          </a:xfrm>
-          <a:prstGeom prst="rect">
-            <a:avLst/>
-          </a:prstGeom>
-          <a:noFill/>
-        </p:spPr>
-        <p:txBody>
-          <a:bodyPr wrap="square" anchor="ctr">
+          <p:cNvPr id="21" name="TextBox 20"/>
+          <p:cNvSpPr txBox="1"/>
+          <p:nvPr/>
+        </p:nvSpPr>
+        <p:spPr>
+          <a:xfrm>
+            <a:off x="5029200" y="2343150"/>
+            <a:ext cx="2552700" cy="1143000"/>
+          </a:xfrm>
+          <a:prstGeom prst="rect">
+            <a:avLst/>
+          </a:prstGeom>
+          <a:noFill/>
+        </p:spPr>
+        <p:txBody>
+          <a:bodyPr wrap="none" anchor="ctr">
             <a:spAutoFit/>
           </a:bodyPr>
           <a:lstStyle/>
           <a:p>
             <a:pPr algn="l">
               <a:lnSpc>
-                <a:spcPct val="100000"/>
-              </a:lnSpc>
-            </a:pPr>
-            <a:r>
-              <a:rPr sz="1200" b="1">
-                <a:solidFill>
-                  <a:srgbClr val="475569"/>
+                <a:spcPct val="115000"/>
+              </a:lnSpc>
+            </a:pPr>
+            <a:r>
+              <a:rPr sz="1300" b="1">
+                <a:solidFill>
+                  <a:srgbClr val="0B1D3A"/>
                 </a:solidFill>
                 <a:latin typeface="PingFang SC"/>
               </a:rPr>
@@ -12145,7 +12154,7 @@
       </p:sp>
       <p:sp>
         <p:nvSpPr>
-          <p:cNvPr id="20" name="Rounded Rectangle 19"/>
+          <p:cNvPr id="22" name="Rounded Rectangle 21"/>
           <p:cNvSpPr/>
           <p:nvPr/>
         </p:nvSpPr>
@@ -12193,7 +12202,7 @@
       </p:sp>
       <p:sp>
         <p:nvSpPr>
-          <p:cNvPr id="21" name="Rectangle 20"/>
+          <p:cNvPr id="23" name="Rectangle 22"/>
           <p:cNvSpPr/>
           <p:nvPr/>
         </p:nvSpPr>
@@ -12237,35 +12246,35 @@
       </p:sp>
       <p:sp>
         <p:nvSpPr>
-          <p:cNvPr id="22" name="TextBox 21"/>
-          <p:cNvSpPr txBox="1"/>
-          <p:nvPr/>
-        </p:nvSpPr>
-        <p:spPr>
-          <a:xfrm>
-            <a:off x="7981950" y="2343150"/>
-            <a:ext cx="2590800" cy="1143000"/>
-          </a:xfrm>
-          <a:prstGeom prst="rect">
-            <a:avLst/>
-          </a:prstGeom>
-          <a:noFill/>
-        </p:spPr>
-        <p:txBody>
-          <a:bodyPr wrap="square" anchor="ctr">
+          <p:cNvPr id="24" name="TextBox 23"/>
+          <p:cNvSpPr txBox="1"/>
+          <p:nvPr/>
+        </p:nvSpPr>
+        <p:spPr>
+          <a:xfrm>
+            <a:off x="8001000" y="2343150"/>
+            <a:ext cx="2552700" cy="1143000"/>
+          </a:xfrm>
+          <a:prstGeom prst="rect">
+            <a:avLst/>
+          </a:prstGeom>
+          <a:noFill/>
+        </p:spPr>
+        <p:txBody>
+          <a:bodyPr wrap="none" anchor="ctr">
             <a:spAutoFit/>
           </a:bodyPr>
           <a:lstStyle/>
           <a:p>
             <a:pPr algn="l">
               <a:lnSpc>
-                <a:spcPct val="100000"/>
-              </a:lnSpc>
-            </a:pPr>
-            <a:r>
-              <a:rPr sz="1200" b="1">
-                <a:solidFill>
-                  <a:srgbClr val="475569"/>
+                <a:spcPct val="115000"/>
+              </a:lnSpc>
+            </a:pPr>
+            <a:r>
+              <a:rPr sz="1300" b="1">
+                <a:solidFill>
+                  <a:srgbClr val="0B1D3A"/>
                 </a:solidFill>
                 <a:latin typeface="PingFang SC"/>
               </a:rPr>
@@ -12276,7 +12285,7 @@
       </p:sp>
       <p:cxnSp>
         <p:nvCxnSpPr>
-          <p:cNvPr id="23" name="Connector 22"/>
+          <p:cNvPr id="25" name="Connector 24"/>
           <p:cNvCxnSpPr/>
           <p:nvPr/>
         </p:nvCxnSpPr>
@@ -12288,9 +12297,9 @@
           <a:prstGeom prst="line">
             <a:avLst/>
           </a:prstGeom>
-          <a:ln w="15240">
+          <a:ln w="17780">
             <a:solidFill>
-              <a:srgbClr val="94A3B8"/>
+              <a:srgbClr val="475569"/>
             </a:solidFill>
           </a:ln>
         </p:spPr>
@@ -12311,7 +12320,7 @@
       </p:cxnSp>
       <p:sp>
         <p:nvSpPr>
-          <p:cNvPr id="24" name="Isosceles Triangle 23"/>
+          <p:cNvPr id="26" name="Isosceles Triangle 25"/>
           <p:cNvSpPr/>
           <p:nvPr/>
         </p:nvSpPr>
@@ -12324,7 +12333,7 @@
             <a:avLst/>
           </a:prstGeom>
           <a:solidFill>
-            <a:srgbClr val="94A3B8"/>
+            <a:srgbClr val="475569"/>
           </a:solidFill>
           <a:ln>
             <a:noFill/>
@@ -12355,53 +12364,14 @@
       </p:sp>
       <p:sp>
         <p:nvSpPr>
-          <p:cNvPr id="25" name="TextBox 24"/>
-          <p:cNvSpPr txBox="1"/>
-          <p:nvPr/>
-        </p:nvSpPr>
-        <p:spPr>
-          <a:xfrm>
-            <a:off x="6248400" y="3486150"/>
-            <a:ext cx="2095500" cy="247650"/>
-          </a:xfrm>
-          <a:prstGeom prst="rect">
-            <a:avLst/>
-          </a:prstGeom>
-          <a:noFill/>
-        </p:spPr>
-        <p:txBody>
-          <a:bodyPr wrap="square" anchor="ctr">
-            <a:spAutoFit/>
-          </a:bodyPr>
-          <a:lstStyle/>
-          <a:p>
-            <a:pPr algn="l">
-              <a:lnSpc>
-                <a:spcPct val="100000"/>
-              </a:lnSpc>
-            </a:pPr>
-            <a:r>
-              <a:rPr sz="1000" b="0">
-                <a:solidFill>
-                  <a:srgbClr val="94A3B8"/>
-                </a:solidFill>
-                <a:latin typeface="PingFang SC"/>
-              </a:rPr>
-              <a:t>受限执行</a:t>
-            </a:r>
-          </a:p>
-        </p:txBody>
-      </p:sp>
-      <p:sp>
-        <p:nvSpPr>
-          <p:cNvPr id="26" name="Rounded Rectangle 25"/>
-          <p:cNvSpPr/>
-          <p:nvPr/>
-        </p:nvSpPr>
-        <p:spPr>
-          <a:xfrm>
-            <a:off x="1847850" y="3695700"/>
-            <a:ext cx="8877300" cy="1219200"/>
+          <p:cNvPr id="27" name="Rounded Rectangle 26"/>
+          <p:cNvSpPr/>
+          <p:nvPr/>
+        </p:nvSpPr>
+        <p:spPr>
+          <a:xfrm>
+            <a:off x="5553075" y="3524250"/>
+            <a:ext cx="1085850" cy="171450"/>
           </a:xfrm>
           <a:prstGeom prst="roundRect">
             <a:avLst>
@@ -12409,45 +12379,86 @@
             </a:avLst>
           </a:prstGeom>
           <a:solidFill>
-            <a:srgbClr val="F1F5F9"/>
-          </a:solidFill>
-          <a:ln>
-            <a:noFill/>
-          </a:ln>
-          <a:effectLst/>
-        </p:spPr>
-        <p:style>
-          <a:lnRef idx="1">
-            <a:schemeClr val="accent1"/>
-          </a:lnRef>
-          <a:fillRef idx="3">
-            <a:schemeClr val="accent1"/>
-          </a:fillRef>
-          <a:effectRef idx="2">
-            <a:schemeClr val="accent1"/>
-          </a:effectRef>
-          <a:fontRef idx="minor">
-            <a:schemeClr val="lt1"/>
-          </a:fontRef>
-        </p:style>
-        <p:txBody>
-          <a:bodyPr rtlCol="0" anchor="ctr"/>
-          <a:lstStyle/>
-          <a:p>
-            <a:pPr algn="ctr"/>
-          </a:p>
-        </p:txBody>
-      </p:sp>
-      <p:sp>
-        <p:nvSpPr>
-          <p:cNvPr id="27" name="Rounded Rectangle 26"/>
-          <p:cNvSpPr/>
-          <p:nvPr/>
-        </p:nvSpPr>
-        <p:spPr>
-          <a:xfrm>
-            <a:off x="1905000" y="3733800"/>
-            <a:ext cx="8763000" cy="1143000"/>
+            <a:srgbClr val="FFFFFF"/>
+          </a:solidFill>
+          <a:ln w="12700">
+            <a:solidFill>
+              <a:srgbClr val="DDE5EE"/>
+            </a:solidFill>
+          </a:ln>
+          <a:effectLst/>
+        </p:spPr>
+        <p:style>
+          <a:lnRef idx="1">
+            <a:schemeClr val="accent1"/>
+          </a:lnRef>
+          <a:fillRef idx="3">
+            <a:schemeClr val="accent1"/>
+          </a:fillRef>
+          <a:effectRef idx="2">
+            <a:schemeClr val="accent1"/>
+          </a:effectRef>
+          <a:fontRef idx="minor">
+            <a:schemeClr val="lt1"/>
+          </a:fontRef>
+        </p:style>
+        <p:txBody>
+          <a:bodyPr rtlCol="0" anchor="ctr"/>
+          <a:lstStyle/>
+          <a:p>
+            <a:pPr algn="ctr"/>
+          </a:p>
+        </p:txBody>
+      </p:sp>
+      <p:sp>
+        <p:nvSpPr>
+          <p:cNvPr id="28" name="TextBox 27"/>
+          <p:cNvSpPr txBox="1"/>
+          <p:nvPr/>
+        </p:nvSpPr>
+        <p:spPr>
+          <a:xfrm>
+            <a:off x="5553075" y="3524250"/>
+            <a:ext cx="1085850" cy="171450"/>
+          </a:xfrm>
+          <a:prstGeom prst="rect">
+            <a:avLst/>
+          </a:prstGeom>
+          <a:noFill/>
+        </p:spPr>
+        <p:txBody>
+          <a:bodyPr wrap="square" anchor="ctr">
+            <a:spAutoFit/>
+          </a:bodyPr>
+          <a:lstStyle/>
+          <a:p>
+            <a:pPr algn="ctr">
+              <a:lnSpc>
+                <a:spcPct val="100000"/>
+              </a:lnSpc>
+            </a:pPr>
+            <a:r>
+              <a:rPr sz="1100" b="1">
+                <a:solidFill>
+                  <a:srgbClr val="0B1D3A"/>
+                </a:solidFill>
+                <a:latin typeface="PingFang SC"/>
+              </a:rPr>
+              <a:t>受限执行</a:t>
+            </a:r>
+          </a:p>
+        </p:txBody>
+      </p:sp>
+      <p:sp>
+        <p:nvSpPr>
+          <p:cNvPr id="29" name="Rounded Rectangle 28"/>
+          <p:cNvSpPr/>
+          <p:nvPr/>
+        </p:nvSpPr>
+        <p:spPr>
+          <a:xfrm>
+            <a:off x="1847850" y="3695700"/>
+            <a:ext cx="8877300" cy="1219200"/>
           </a:xfrm>
           <a:prstGeom prst="roundRect">
             <a:avLst>
@@ -12455,6 +12466,91 @@
             </a:avLst>
           </a:prstGeom>
           <a:solidFill>
+            <a:srgbClr val="F1F5F9"/>
+          </a:solidFill>
+          <a:ln>
+            <a:noFill/>
+          </a:ln>
+          <a:effectLst/>
+        </p:spPr>
+        <p:style>
+          <a:lnRef idx="1">
+            <a:schemeClr val="accent1"/>
+          </a:lnRef>
+          <a:fillRef idx="3">
+            <a:schemeClr val="accent1"/>
+          </a:fillRef>
+          <a:effectRef idx="2">
+            <a:schemeClr val="accent1"/>
+          </a:effectRef>
+          <a:fontRef idx="minor">
+            <a:schemeClr val="lt1"/>
+          </a:fontRef>
+        </p:style>
+        <p:txBody>
+          <a:bodyPr rtlCol="0" anchor="ctr"/>
+          <a:lstStyle/>
+          <a:p>
+            <a:pPr algn="ctr"/>
+          </a:p>
+        </p:txBody>
+      </p:sp>
+      <p:sp>
+        <p:nvSpPr>
+          <p:cNvPr id="30" name="TextBox 29"/>
+          <p:cNvSpPr txBox="1"/>
+          <p:nvPr/>
+        </p:nvSpPr>
+        <p:spPr>
+          <a:xfrm>
+            <a:off x="1962150" y="3467100"/>
+            <a:ext cx="1905000" cy="209550"/>
+          </a:xfrm>
+          <a:prstGeom prst="rect">
+            <a:avLst/>
+          </a:prstGeom>
+          <a:noFill/>
+        </p:spPr>
+        <p:txBody>
+          <a:bodyPr wrap="square" anchor="ctr">
+            <a:spAutoFit/>
+          </a:bodyPr>
+          <a:lstStyle/>
+          <a:p>
+            <a:pPr algn="l">
+              <a:lnSpc>
+                <a:spcPct val="100000"/>
+              </a:lnSpc>
+            </a:pPr>
+            <a:r>
+              <a:rPr sz="1100" b="1">
+                <a:solidFill>
+                  <a:srgbClr val="8B5CF6"/>
+                </a:solidFill>
+                <a:latin typeface="PingFang SC"/>
+              </a:rPr>
+              <a:t>L3</a:t>
+            </a:r>
+          </a:p>
+        </p:txBody>
+      </p:sp>
+      <p:sp>
+        <p:nvSpPr>
+          <p:cNvPr id="31" name="Rounded Rectangle 30"/>
+          <p:cNvSpPr/>
+          <p:nvPr/>
+        </p:nvSpPr>
+        <p:spPr>
+          <a:xfrm>
+            <a:off x="1905000" y="3733800"/>
+            <a:ext cx="8763000" cy="1143000"/>
+          </a:xfrm>
+          <a:prstGeom prst="roundRect">
+            <a:avLst>
+              <a:gd name="adj" fmla="val 8000"/>
+            </a:avLst>
+          </a:prstGeom>
+          <a:solidFill>
             <a:srgbClr val="FFFFFF"/>
           </a:solidFill>
           <a:ln w="12700">
@@ -12488,7 +12584,7 @@
       </p:sp>
       <p:sp>
         <p:nvSpPr>
-          <p:cNvPr id="28" name="Rectangle 27"/>
+          <p:cNvPr id="32" name="Rectangle 31"/>
           <p:cNvSpPr/>
           <p:nvPr/>
         </p:nvSpPr>
@@ -12532,46 +12628,46 @@
       </p:sp>
       <p:sp>
         <p:nvSpPr>
-          <p:cNvPr id="29" name="TextBox 28"/>
-          <p:cNvSpPr txBox="1"/>
-          <p:nvPr/>
-        </p:nvSpPr>
-        <p:spPr>
-          <a:xfrm>
-            <a:off x="2038350" y="3733800"/>
-            <a:ext cx="8534400" cy="1143000"/>
-          </a:xfrm>
-          <a:prstGeom prst="rect">
-            <a:avLst/>
-          </a:prstGeom>
-          <a:noFill/>
-        </p:spPr>
-        <p:txBody>
-          <a:bodyPr wrap="square" anchor="ctr">
+          <p:cNvPr id="33" name="TextBox 32"/>
+          <p:cNvSpPr txBox="1"/>
+          <p:nvPr/>
+        </p:nvSpPr>
+        <p:spPr>
+          <a:xfrm>
+            <a:off x="2057400" y="3733800"/>
+            <a:ext cx="8496300" cy="1143000"/>
+          </a:xfrm>
+          <a:prstGeom prst="rect">
+            <a:avLst/>
+          </a:prstGeom>
+          <a:noFill/>
+        </p:spPr>
+        <p:txBody>
+          <a:bodyPr wrap="none" anchor="ctr">
             <a:spAutoFit/>
           </a:bodyPr>
           <a:lstStyle/>
           <a:p>
             <a:pPr algn="l">
               <a:lnSpc>
-                <a:spcPct val="100000"/>
-              </a:lnSpc>
-            </a:pPr>
-            <a:r>
-              <a:rPr sz="1200" b="1">
-                <a:solidFill>
-                  <a:srgbClr val="475569"/>
-                </a:solidFill>
-                <a:latin typeface="PingFang SC"/>
-              </a:rPr>
-              <a:t>回流:结论+证据+风险|一个"完整但被关小"的 Agent</a:t>
-            </a:r>
-          </a:p>
-        </p:txBody>
-      </p:sp>
-      <p:sp>
-        <p:nvSpPr>
-          <p:cNvPr id="30" name="TextBox 29"/>
+                <a:spcPct val="115000"/>
+              </a:lnSpc>
+            </a:pPr>
+            <a:r>
+              <a:rPr sz="1300" b="1">
+                <a:solidFill>
+                  <a:srgbClr val="0B1D3A"/>
+                </a:solidFill>
+                <a:latin typeface="PingFang SC"/>
+              </a:rPr>
+              <a:t>回流:结论+证据+风险</a:t>
+            </a:r>
+          </a:p>
+        </p:txBody>
+      </p:sp>
+      <p:sp>
+        <p:nvSpPr>
+          <p:cNvPr id="34" name="TextBox 33"/>
           <p:cNvSpPr txBox="1"/>
           <p:nvPr/>
         </p:nvSpPr>
@@ -12610,7 +12706,7 @@
       </p:sp>
       <p:sp>
         <p:nvSpPr>
-          <p:cNvPr id="31" name="TextBox 30"/>
+          <p:cNvPr id="35" name="TextBox 34"/>
           <p:cNvSpPr txBox="1"/>
           <p:nvPr/>
         </p:nvSpPr>
@@ -16596,7 +16692,7 @@
                 </a:solidFill>
                 <a:latin typeface="PingFang SC"/>
               </a:rPr>
-              <a:t>动作+决策日志|对应平台 Checkpoint+GraphQL+AuditBus</a:t>
+              <a:t>动作+决策日志</a:t>
             </a:r>
           </a:p>
         </p:txBody>
@@ -37718,7 +37814,7 @@
                 </a:solidFill>
                 <a:latin typeface="PingFang SC"/>
               </a:rPr>
-              <a:t>恢复/查询/审计|每条线在平台都有对应实现</a:t>
+              <a:t>恢复/查询/审计</a:t>
             </a:r>
           </a:p>
         </p:txBody>
@@ -39889,7 +39985,7 @@
                 </a:solidFill>
                 <a:latin typeface="PingFang SC"/>
               </a:rPr>
-              <a:t>5. 终态+Trace 归档|输入从此有身份:可查可控可恢复</a:t>
+              <a:t>5. 终态+Trace 归档</a:t>
             </a:r>
           </a:p>
         </p:txBody>

--- a/03-课件PPT/讲次版/第7章-1-讲次 7-1 · DeerFlow 企业级平台架构解析.pptx
+++ b/03-课件PPT/讲次版/第7章-1-讲次 7-1 · DeerFlow 企业级平台架构解析.pptx
@@ -11617,7 +11617,7 @@
           <a:noFill/>
         </p:spPr>
         <p:txBody>
-          <a:bodyPr wrap="none" anchor="ctr">
+          <a:bodyPr wrap="square" anchor="ctr">
             <a:spAutoFit/>
           </a:bodyPr>
           <a:lstStyle/>
@@ -11999,7 +11999,7 @@
           <a:noFill/>
         </p:spPr>
         <p:txBody>
-          <a:bodyPr wrap="none" anchor="ctr">
+          <a:bodyPr wrap="square" anchor="ctr">
             <a:spAutoFit/>
           </a:bodyPr>
           <a:lstStyle/>
@@ -12130,7 +12130,7 @@
           <a:noFill/>
         </p:spPr>
         <p:txBody>
-          <a:bodyPr wrap="none" anchor="ctr">
+          <a:bodyPr wrap="square" anchor="ctr">
             <a:spAutoFit/>
           </a:bodyPr>
           <a:lstStyle/>
@@ -12261,7 +12261,7 @@
           <a:noFill/>
         </p:spPr>
         <p:txBody>
-          <a:bodyPr wrap="none" anchor="ctr">
+          <a:bodyPr wrap="square" anchor="ctr">
             <a:spAutoFit/>
           </a:bodyPr>
           <a:lstStyle/>
@@ -12643,7 +12643,7 @@
           <a:noFill/>
         </p:spPr>
         <p:txBody>
-          <a:bodyPr wrap="none" anchor="ctr">
+          <a:bodyPr wrap="square" anchor="ctr">
             <a:spAutoFit/>
           </a:bodyPr>
           <a:lstStyle/>
